--- a/00soportes/Marca personal/Iconos/laboratorio.pptx
+++ b/00soportes/Marca personal/Iconos/laboratorio.pptx
@@ -6,6 +6,7 @@
   </p:sldMasterIdLst>
   <p:sldIdLst>
     <p:sldId id="256" r:id="rId2"/>
+    <p:sldId id="257" r:id="rId3"/>
   </p:sldIdLst>
   <p:sldSz cx="12192000" cy="6858000"/>
   <p:notesSz cx="6858000" cy="9144000"/>
@@ -154,7 +155,7 @@
           </a:lstStyle>
           <a:p>
             <a:r>
-              <a:rPr lang="es-ES" smtClean="0"/>
+              <a:rPr lang="es-ES"/>
               <a:t>Haga clic para modificar el estilo de título del patrón</a:t>
             </a:r>
             <a:endParaRPr lang="es-VE"/>
@@ -219,7 +220,7 @@
           </a:lstStyle>
           <a:p>
             <a:r>
-              <a:rPr lang="es-ES" smtClean="0"/>
+              <a:rPr lang="es-ES"/>
               <a:t>Haga clic para editar el estilo de subtítulo del patrón</a:t>
             </a:r>
             <a:endParaRPr lang="es-VE"/>
@@ -243,7 +244,7 @@
           <a:p>
             <a:fld id="{87907EF1-B7C5-45C3-A890-A7E50ECE3020}" type="datetimeFigureOut">
               <a:rPr lang="es-VE" smtClean="0"/>
-              <a:t>18/8/2021</a:t>
+              <a:t>20/8/2026</a:t>
             </a:fld>
             <a:endParaRPr lang="es-VE"/>
           </a:p>
@@ -337,7 +338,7 @@
           <a:lstStyle/>
           <a:p>
             <a:r>
-              <a:rPr lang="es-ES" smtClean="0"/>
+              <a:rPr lang="es-ES"/>
               <a:t>Haga clic para modificar el estilo de título del patrón</a:t>
             </a:r>
             <a:endParaRPr lang="es-VE"/>
@@ -361,35 +362,35 @@
           <a:p>
             <a:pPr lvl="0"/>
             <a:r>
-              <a:rPr lang="es-ES" smtClean="0"/>
+              <a:rPr lang="es-ES"/>
               <a:t>Editar el estilo de texto del patrón</a:t>
             </a:r>
           </a:p>
           <a:p>
             <a:pPr lvl="1"/>
             <a:r>
-              <a:rPr lang="es-ES" smtClean="0"/>
+              <a:rPr lang="es-ES"/>
               <a:t>Segundo nivel</a:t>
             </a:r>
           </a:p>
           <a:p>
             <a:pPr lvl="2"/>
             <a:r>
-              <a:rPr lang="es-ES" smtClean="0"/>
+              <a:rPr lang="es-ES"/>
               <a:t>Tercer nivel</a:t>
             </a:r>
           </a:p>
           <a:p>
             <a:pPr lvl="3"/>
             <a:r>
-              <a:rPr lang="es-ES" smtClean="0"/>
+              <a:rPr lang="es-ES"/>
               <a:t>Cuarto nivel</a:t>
             </a:r>
           </a:p>
           <a:p>
             <a:pPr lvl="4"/>
             <a:r>
-              <a:rPr lang="es-ES" smtClean="0"/>
+              <a:rPr lang="es-ES"/>
               <a:t>Quinto nivel</a:t>
             </a:r>
             <a:endParaRPr lang="es-VE"/>
@@ -413,7 +414,7 @@
           <a:p>
             <a:fld id="{87907EF1-B7C5-45C3-A890-A7E50ECE3020}" type="datetimeFigureOut">
               <a:rPr lang="es-VE" smtClean="0"/>
-              <a:t>18/8/2021</a:t>
+              <a:t>20/8/2026</a:t>
             </a:fld>
             <a:endParaRPr lang="es-VE"/>
           </a:p>
@@ -512,7 +513,7 @@
           <a:lstStyle/>
           <a:p>
             <a:r>
-              <a:rPr lang="es-ES" smtClean="0"/>
+              <a:rPr lang="es-ES"/>
               <a:t>Haga clic para modificar el estilo de título del patrón</a:t>
             </a:r>
             <a:endParaRPr lang="es-VE"/>
@@ -541,35 +542,35 @@
           <a:p>
             <a:pPr lvl="0"/>
             <a:r>
-              <a:rPr lang="es-ES" smtClean="0"/>
+              <a:rPr lang="es-ES"/>
               <a:t>Editar el estilo de texto del patrón</a:t>
             </a:r>
           </a:p>
           <a:p>
             <a:pPr lvl="1"/>
             <a:r>
-              <a:rPr lang="es-ES" smtClean="0"/>
+              <a:rPr lang="es-ES"/>
               <a:t>Segundo nivel</a:t>
             </a:r>
           </a:p>
           <a:p>
             <a:pPr lvl="2"/>
             <a:r>
-              <a:rPr lang="es-ES" smtClean="0"/>
+              <a:rPr lang="es-ES"/>
               <a:t>Tercer nivel</a:t>
             </a:r>
           </a:p>
           <a:p>
             <a:pPr lvl="3"/>
             <a:r>
-              <a:rPr lang="es-ES" smtClean="0"/>
+              <a:rPr lang="es-ES"/>
               <a:t>Cuarto nivel</a:t>
             </a:r>
           </a:p>
           <a:p>
             <a:pPr lvl="4"/>
             <a:r>
-              <a:rPr lang="es-ES" smtClean="0"/>
+              <a:rPr lang="es-ES"/>
               <a:t>Quinto nivel</a:t>
             </a:r>
             <a:endParaRPr lang="es-VE"/>
@@ -593,7 +594,7 @@
           <a:p>
             <a:fld id="{87907EF1-B7C5-45C3-A890-A7E50ECE3020}" type="datetimeFigureOut">
               <a:rPr lang="es-VE" smtClean="0"/>
-              <a:t>18/8/2021</a:t>
+              <a:t>20/8/2026</a:t>
             </a:fld>
             <a:endParaRPr lang="es-VE"/>
           </a:p>
@@ -687,7 +688,7 @@
           <a:lstStyle/>
           <a:p>
             <a:r>
-              <a:rPr lang="es-ES" smtClean="0"/>
+              <a:rPr lang="es-ES"/>
               <a:t>Haga clic para modificar el estilo de título del patrón</a:t>
             </a:r>
             <a:endParaRPr lang="es-VE"/>
@@ -711,35 +712,35 @@
           <a:p>
             <a:pPr lvl="0"/>
             <a:r>
-              <a:rPr lang="es-ES" smtClean="0"/>
+              <a:rPr lang="es-ES"/>
               <a:t>Editar el estilo de texto del patrón</a:t>
             </a:r>
           </a:p>
           <a:p>
             <a:pPr lvl="1"/>
             <a:r>
-              <a:rPr lang="es-ES" smtClean="0"/>
+              <a:rPr lang="es-ES"/>
               <a:t>Segundo nivel</a:t>
             </a:r>
           </a:p>
           <a:p>
             <a:pPr lvl="2"/>
             <a:r>
-              <a:rPr lang="es-ES" smtClean="0"/>
+              <a:rPr lang="es-ES"/>
               <a:t>Tercer nivel</a:t>
             </a:r>
           </a:p>
           <a:p>
             <a:pPr lvl="3"/>
             <a:r>
-              <a:rPr lang="es-ES" smtClean="0"/>
+              <a:rPr lang="es-ES"/>
               <a:t>Cuarto nivel</a:t>
             </a:r>
           </a:p>
           <a:p>
             <a:pPr lvl="4"/>
             <a:r>
-              <a:rPr lang="es-ES" smtClean="0"/>
+              <a:rPr lang="es-ES"/>
               <a:t>Quinto nivel</a:t>
             </a:r>
             <a:endParaRPr lang="es-VE"/>
@@ -763,7 +764,7 @@
           <a:p>
             <a:fld id="{87907EF1-B7C5-45C3-A890-A7E50ECE3020}" type="datetimeFigureOut">
               <a:rPr lang="es-VE" smtClean="0"/>
-              <a:t>18/8/2021</a:t>
+              <a:t>20/8/2026</a:t>
             </a:fld>
             <a:endParaRPr lang="es-VE"/>
           </a:p>
@@ -866,7 +867,7 @@
           </a:lstStyle>
           <a:p>
             <a:r>
-              <a:rPr lang="es-ES" smtClean="0"/>
+              <a:rPr lang="es-ES"/>
               <a:t>Haga clic para modificar el estilo de título del patrón</a:t>
             </a:r>
             <a:endParaRPr lang="es-VE"/>
@@ -986,7 +987,7 @@
           <a:p>
             <a:pPr lvl="0"/>
             <a:r>
-              <a:rPr lang="es-ES" smtClean="0"/>
+              <a:rPr lang="es-ES"/>
               <a:t>Editar el estilo de texto del patrón</a:t>
             </a:r>
           </a:p>
@@ -1009,7 +1010,7 @@
           <a:p>
             <a:fld id="{87907EF1-B7C5-45C3-A890-A7E50ECE3020}" type="datetimeFigureOut">
               <a:rPr lang="es-VE" smtClean="0"/>
-              <a:t>18/8/2021</a:t>
+              <a:t>20/8/2026</a:t>
             </a:fld>
             <a:endParaRPr lang="es-VE"/>
           </a:p>
@@ -1103,7 +1104,7 @@
           <a:lstStyle/>
           <a:p>
             <a:r>
-              <a:rPr lang="es-ES" smtClean="0"/>
+              <a:rPr lang="es-ES"/>
               <a:t>Haga clic para modificar el estilo de título del patrón</a:t>
             </a:r>
             <a:endParaRPr lang="es-VE"/>
@@ -1132,35 +1133,35 @@
           <a:p>
             <a:pPr lvl="0"/>
             <a:r>
-              <a:rPr lang="es-ES" smtClean="0"/>
+              <a:rPr lang="es-ES"/>
               <a:t>Editar el estilo de texto del patrón</a:t>
             </a:r>
           </a:p>
           <a:p>
             <a:pPr lvl="1"/>
             <a:r>
-              <a:rPr lang="es-ES" smtClean="0"/>
+              <a:rPr lang="es-ES"/>
               <a:t>Segundo nivel</a:t>
             </a:r>
           </a:p>
           <a:p>
             <a:pPr lvl="2"/>
             <a:r>
-              <a:rPr lang="es-ES" smtClean="0"/>
+              <a:rPr lang="es-ES"/>
               <a:t>Tercer nivel</a:t>
             </a:r>
           </a:p>
           <a:p>
             <a:pPr lvl="3"/>
             <a:r>
-              <a:rPr lang="es-ES" smtClean="0"/>
+              <a:rPr lang="es-ES"/>
               <a:t>Cuarto nivel</a:t>
             </a:r>
           </a:p>
           <a:p>
             <a:pPr lvl="4"/>
             <a:r>
-              <a:rPr lang="es-ES" smtClean="0"/>
+              <a:rPr lang="es-ES"/>
               <a:t>Quinto nivel</a:t>
             </a:r>
             <a:endParaRPr lang="es-VE"/>
@@ -1189,35 +1190,35 @@
           <a:p>
             <a:pPr lvl="0"/>
             <a:r>
-              <a:rPr lang="es-ES" smtClean="0"/>
+              <a:rPr lang="es-ES"/>
               <a:t>Editar el estilo de texto del patrón</a:t>
             </a:r>
           </a:p>
           <a:p>
             <a:pPr lvl="1"/>
             <a:r>
-              <a:rPr lang="es-ES" smtClean="0"/>
+              <a:rPr lang="es-ES"/>
               <a:t>Segundo nivel</a:t>
             </a:r>
           </a:p>
           <a:p>
             <a:pPr lvl="2"/>
             <a:r>
-              <a:rPr lang="es-ES" smtClean="0"/>
+              <a:rPr lang="es-ES"/>
               <a:t>Tercer nivel</a:t>
             </a:r>
           </a:p>
           <a:p>
             <a:pPr lvl="3"/>
             <a:r>
-              <a:rPr lang="es-ES" smtClean="0"/>
+              <a:rPr lang="es-ES"/>
               <a:t>Cuarto nivel</a:t>
             </a:r>
           </a:p>
           <a:p>
             <a:pPr lvl="4"/>
             <a:r>
-              <a:rPr lang="es-ES" smtClean="0"/>
+              <a:rPr lang="es-ES"/>
               <a:t>Quinto nivel</a:t>
             </a:r>
             <a:endParaRPr lang="es-VE"/>
@@ -1241,7 +1242,7 @@
           <a:p>
             <a:fld id="{87907EF1-B7C5-45C3-A890-A7E50ECE3020}" type="datetimeFigureOut">
               <a:rPr lang="es-VE" smtClean="0"/>
-              <a:t>18/8/2021</a:t>
+              <a:t>20/8/2026</a:t>
             </a:fld>
             <a:endParaRPr lang="es-VE"/>
           </a:p>
@@ -1340,7 +1341,7 @@
           <a:lstStyle/>
           <a:p>
             <a:r>
-              <a:rPr lang="es-ES" smtClean="0"/>
+              <a:rPr lang="es-ES"/>
               <a:t>Haga clic para modificar el estilo de título del patrón</a:t>
             </a:r>
             <a:endParaRPr lang="es-VE"/>
@@ -1406,7 +1407,7 @@
           <a:p>
             <a:pPr lvl="0"/>
             <a:r>
-              <a:rPr lang="es-ES" smtClean="0"/>
+              <a:rPr lang="es-ES"/>
               <a:t>Editar el estilo de texto del patrón</a:t>
             </a:r>
           </a:p>
@@ -1434,35 +1435,35 @@
           <a:p>
             <a:pPr lvl="0"/>
             <a:r>
-              <a:rPr lang="es-ES" smtClean="0"/>
+              <a:rPr lang="es-ES"/>
               <a:t>Editar el estilo de texto del patrón</a:t>
             </a:r>
           </a:p>
           <a:p>
             <a:pPr lvl="1"/>
             <a:r>
-              <a:rPr lang="es-ES" smtClean="0"/>
+              <a:rPr lang="es-ES"/>
               <a:t>Segundo nivel</a:t>
             </a:r>
           </a:p>
           <a:p>
             <a:pPr lvl="2"/>
             <a:r>
-              <a:rPr lang="es-ES" smtClean="0"/>
+              <a:rPr lang="es-ES"/>
               <a:t>Tercer nivel</a:t>
             </a:r>
           </a:p>
           <a:p>
             <a:pPr lvl="3"/>
             <a:r>
-              <a:rPr lang="es-ES" smtClean="0"/>
+              <a:rPr lang="es-ES"/>
               <a:t>Cuarto nivel</a:t>
             </a:r>
           </a:p>
           <a:p>
             <a:pPr lvl="4"/>
             <a:r>
-              <a:rPr lang="es-ES" smtClean="0"/>
+              <a:rPr lang="es-ES"/>
               <a:t>Quinto nivel</a:t>
             </a:r>
             <a:endParaRPr lang="es-VE"/>
@@ -1528,7 +1529,7 @@
           <a:p>
             <a:pPr lvl="0"/>
             <a:r>
-              <a:rPr lang="es-ES" smtClean="0"/>
+              <a:rPr lang="es-ES"/>
               <a:t>Editar el estilo de texto del patrón</a:t>
             </a:r>
           </a:p>
@@ -1556,35 +1557,35 @@
           <a:p>
             <a:pPr lvl="0"/>
             <a:r>
-              <a:rPr lang="es-ES" smtClean="0"/>
+              <a:rPr lang="es-ES"/>
               <a:t>Editar el estilo de texto del patrón</a:t>
             </a:r>
           </a:p>
           <a:p>
             <a:pPr lvl="1"/>
             <a:r>
-              <a:rPr lang="es-ES" smtClean="0"/>
+              <a:rPr lang="es-ES"/>
               <a:t>Segundo nivel</a:t>
             </a:r>
           </a:p>
           <a:p>
             <a:pPr lvl="2"/>
             <a:r>
-              <a:rPr lang="es-ES" smtClean="0"/>
+              <a:rPr lang="es-ES"/>
               <a:t>Tercer nivel</a:t>
             </a:r>
           </a:p>
           <a:p>
             <a:pPr lvl="3"/>
             <a:r>
-              <a:rPr lang="es-ES" smtClean="0"/>
+              <a:rPr lang="es-ES"/>
               <a:t>Cuarto nivel</a:t>
             </a:r>
           </a:p>
           <a:p>
             <a:pPr lvl="4"/>
             <a:r>
-              <a:rPr lang="es-ES" smtClean="0"/>
+              <a:rPr lang="es-ES"/>
               <a:t>Quinto nivel</a:t>
             </a:r>
             <a:endParaRPr lang="es-VE"/>
@@ -1608,7 +1609,7 @@
           <a:p>
             <a:fld id="{87907EF1-B7C5-45C3-A890-A7E50ECE3020}" type="datetimeFigureOut">
               <a:rPr lang="es-VE" smtClean="0"/>
-              <a:t>18/8/2021</a:t>
+              <a:t>20/8/2026</a:t>
             </a:fld>
             <a:endParaRPr lang="es-VE"/>
           </a:p>
@@ -1702,7 +1703,7 @@
           <a:lstStyle/>
           <a:p>
             <a:r>
-              <a:rPr lang="es-ES" smtClean="0"/>
+              <a:rPr lang="es-ES"/>
               <a:t>Haga clic para modificar el estilo de título del patrón</a:t>
             </a:r>
             <a:endParaRPr lang="es-VE"/>
@@ -1726,7 +1727,7 @@
           <a:p>
             <a:fld id="{87907EF1-B7C5-45C3-A890-A7E50ECE3020}" type="datetimeFigureOut">
               <a:rPr lang="es-VE" smtClean="0"/>
-              <a:t>18/8/2021</a:t>
+              <a:t>20/8/2026</a:t>
             </a:fld>
             <a:endParaRPr lang="es-VE"/>
           </a:p>
@@ -1821,7 +1822,7 @@
           <a:p>
             <a:fld id="{87907EF1-B7C5-45C3-A890-A7E50ECE3020}" type="datetimeFigureOut">
               <a:rPr lang="es-VE" smtClean="0"/>
-              <a:t>18/8/2021</a:t>
+              <a:t>20/8/2026</a:t>
             </a:fld>
             <a:endParaRPr lang="es-VE"/>
           </a:p>
@@ -1924,7 +1925,7 @@
           </a:lstStyle>
           <a:p>
             <a:r>
-              <a:rPr lang="es-ES" smtClean="0"/>
+              <a:rPr lang="es-ES"/>
               <a:t>Haga clic para modificar el estilo de título del patrón</a:t>
             </a:r>
             <a:endParaRPr lang="es-VE"/>
@@ -1981,35 +1982,35 @@
           <a:p>
             <a:pPr lvl="0"/>
             <a:r>
-              <a:rPr lang="es-ES" smtClean="0"/>
+              <a:rPr lang="es-ES"/>
               <a:t>Editar el estilo de texto del patrón</a:t>
             </a:r>
           </a:p>
           <a:p>
             <a:pPr lvl="1"/>
             <a:r>
-              <a:rPr lang="es-ES" smtClean="0"/>
+              <a:rPr lang="es-ES"/>
               <a:t>Segundo nivel</a:t>
             </a:r>
           </a:p>
           <a:p>
             <a:pPr lvl="2"/>
             <a:r>
-              <a:rPr lang="es-ES" smtClean="0"/>
+              <a:rPr lang="es-ES"/>
               <a:t>Tercer nivel</a:t>
             </a:r>
           </a:p>
           <a:p>
             <a:pPr lvl="3"/>
             <a:r>
-              <a:rPr lang="es-ES" smtClean="0"/>
+              <a:rPr lang="es-ES"/>
               <a:t>Cuarto nivel</a:t>
             </a:r>
           </a:p>
           <a:p>
             <a:pPr lvl="4"/>
             <a:r>
-              <a:rPr lang="es-ES" smtClean="0"/>
+              <a:rPr lang="es-ES"/>
               <a:t>Quinto nivel</a:t>
             </a:r>
             <a:endParaRPr lang="es-VE"/>
@@ -2075,7 +2076,7 @@
           <a:p>
             <a:pPr lvl="0"/>
             <a:r>
-              <a:rPr lang="es-ES" smtClean="0"/>
+              <a:rPr lang="es-ES"/>
               <a:t>Editar el estilo de texto del patrón</a:t>
             </a:r>
           </a:p>
@@ -2098,7 +2099,7 @@
           <a:p>
             <a:fld id="{87907EF1-B7C5-45C3-A890-A7E50ECE3020}" type="datetimeFigureOut">
               <a:rPr lang="es-VE" smtClean="0"/>
-              <a:t>18/8/2021</a:t>
+              <a:t>20/8/2026</a:t>
             </a:fld>
             <a:endParaRPr lang="es-VE"/>
           </a:p>
@@ -2201,7 +2202,7 @@
           </a:lstStyle>
           <a:p>
             <a:r>
-              <a:rPr lang="es-ES" smtClean="0"/>
+              <a:rPr lang="es-ES"/>
               <a:t>Haga clic para modificar el estilo de título del patrón</a:t>
             </a:r>
             <a:endParaRPr lang="es-VE"/>
@@ -2328,7 +2329,7 @@
           <a:p>
             <a:pPr lvl="0"/>
             <a:r>
-              <a:rPr lang="es-ES" smtClean="0"/>
+              <a:rPr lang="es-ES"/>
               <a:t>Editar el estilo de texto del patrón</a:t>
             </a:r>
           </a:p>
@@ -2351,7 +2352,7 @@
           <a:p>
             <a:fld id="{87907EF1-B7C5-45C3-A890-A7E50ECE3020}" type="datetimeFigureOut">
               <a:rPr lang="es-VE" smtClean="0"/>
-              <a:t>18/8/2021</a:t>
+              <a:t>20/8/2026</a:t>
             </a:fld>
             <a:endParaRPr lang="es-VE"/>
           </a:p>
@@ -2460,7 +2461,7 @@
           <a:lstStyle/>
           <a:p>
             <a:r>
-              <a:rPr lang="es-ES" smtClean="0"/>
+              <a:rPr lang="es-ES"/>
               <a:t>Haga clic para modificar el estilo de título del patrón</a:t>
             </a:r>
             <a:endParaRPr lang="es-VE"/>
@@ -2494,35 +2495,35 @@
           <a:p>
             <a:pPr lvl="0"/>
             <a:r>
-              <a:rPr lang="es-ES" smtClean="0"/>
+              <a:rPr lang="es-ES"/>
               <a:t>Editar el estilo de texto del patrón</a:t>
             </a:r>
           </a:p>
           <a:p>
             <a:pPr lvl="1"/>
             <a:r>
-              <a:rPr lang="es-ES" smtClean="0"/>
+              <a:rPr lang="es-ES"/>
               <a:t>Segundo nivel</a:t>
             </a:r>
           </a:p>
           <a:p>
             <a:pPr lvl="2"/>
             <a:r>
-              <a:rPr lang="es-ES" smtClean="0"/>
+              <a:rPr lang="es-ES"/>
               <a:t>Tercer nivel</a:t>
             </a:r>
           </a:p>
           <a:p>
             <a:pPr lvl="3"/>
             <a:r>
-              <a:rPr lang="es-ES" smtClean="0"/>
+              <a:rPr lang="es-ES"/>
               <a:t>Cuarto nivel</a:t>
             </a:r>
           </a:p>
           <a:p>
             <a:pPr lvl="4"/>
             <a:r>
-              <a:rPr lang="es-ES" smtClean="0"/>
+              <a:rPr lang="es-ES"/>
               <a:t>Quinto nivel</a:t>
             </a:r>
             <a:endParaRPr lang="es-VE"/>
@@ -2564,7 +2565,7 @@
           <a:p>
             <a:fld id="{87907EF1-B7C5-45C3-A890-A7E50ECE3020}" type="datetimeFigureOut">
               <a:rPr lang="es-VE" smtClean="0"/>
-              <a:t>18/8/2021</a:t>
+              <a:t>20/8/2026</a:t>
             </a:fld>
             <a:endParaRPr lang="es-VE"/>
           </a:p>
@@ -3030,7 +3031,7 @@
           <a:lstStyle/>
           <a:p>
             <a:r>
-              <a:rPr lang="es-ES" sz="7200" dirty="0" smtClean="0">
+              <a:rPr lang="es-ES" sz="7200" dirty="0">
                 <a:solidFill>
                   <a:schemeClr val="bg1">
                     <a:lumMod val="50000"/>
@@ -3055,6 +3056,66 @@
     <p:extLst>
       <p:ext uri="{BB962C8B-B14F-4D97-AF65-F5344CB8AC3E}">
         <p14:creationId xmlns:p14="http://schemas.microsoft.com/office/powerpoint/2010/main" val="2280942870"/>
+      </p:ext>
+    </p:extLst>
+  </p:cSld>
+  <p:clrMapOvr>
+    <a:masterClrMapping/>
+  </p:clrMapOvr>
+</p:sld>
+</file>
+
+<file path=ppt/slides/slide2.xml><?xml version="1.0" encoding="utf-8"?>
+<p:sld xmlns:a="http://schemas.openxmlformats.org/drawingml/2006/main" xmlns:r="http://schemas.openxmlformats.org/officeDocument/2006/relationships" xmlns:p="http://schemas.openxmlformats.org/presentationml/2006/main">
+  <p:cSld>
+    <p:spTree>
+      <p:nvGrpSpPr>
+        <p:cNvPr id="1" name=""/>
+        <p:cNvGrpSpPr/>
+        <p:nvPr/>
+      </p:nvGrpSpPr>
+      <p:grpSpPr>
+        <a:xfrm>
+          <a:off x="0" y="0"/>
+          <a:ext cx="0" cy="0"/>
+          <a:chOff x="0" y="0"/>
+          <a:chExt cx="0" cy="0"/>
+        </a:xfrm>
+      </p:grpSpPr>
+      <p:pic>
+        <p:nvPicPr>
+          <p:cNvPr id="2" name="Imagen 1"/>
+          <p:cNvPicPr>
+            <a:picLocks noChangeAspect="1"/>
+          </p:cNvPicPr>
+          <p:nvPr/>
+        </p:nvPicPr>
+        <p:blipFill>
+          <a:blip r:embed="rId2" cstate="print">
+            <a:extLst>
+              <a:ext uri="{28A0092B-C50C-407E-A947-70E740481C1C}">
+                <a14:useLocalDpi xmlns:a14="http://schemas.microsoft.com/office/drawing/2010/main" val="0"/>
+              </a:ext>
+            </a:extLst>
+          </a:blip>
+          <a:stretch>
+            <a:fillRect/>
+          </a:stretch>
+        </p:blipFill>
+        <p:spPr>
+          <a:xfrm>
+            <a:off x="0" y="0"/>
+            <a:ext cx="6858000" cy="6858000"/>
+          </a:xfrm>
+          <a:prstGeom prst="rect">
+            <a:avLst/>
+          </a:prstGeom>
+        </p:spPr>
+      </p:pic>
+    </p:spTree>
+    <p:extLst>
+      <p:ext uri="{BB962C8B-B14F-4D97-AF65-F5344CB8AC3E}">
+        <p14:creationId xmlns:p14="http://schemas.microsoft.com/office/powerpoint/2010/main" val="1374097840"/>
       </p:ext>
     </p:extLst>
   </p:cSld>
